--- a/week_08/mongodb_nosql_intro.pptx
+++ b/week_08/mongodb_nosql_intro.pptx
@@ -511,23 +511,7 @@
         <p:txBody>
           <a:bodyPr/>
           <a:lstStyle/>
-          <a:p>
-            <a:r>
-              <a:t>This lecture no longer needs to carry the full NoSQL history by itself because the broad bridge now happens at the end of Week 7. That means Week 8 can spend more time on MongoDB-specific modeling and operations.</a:t>
-            </a:r>
-          </a:p>
           <a:p/>
-          <a:p>
-            <a:r>
-              <a:t>Begin with a fast recap so students reconnect the NoSQL idea to MongoDB without retaking the whole bridge. Then push into the design questions they actually need: what does a document look like, when should data be embedded, how do CRUD and aggregation feel, and what responsibilities stay with the DBA?</a:t>
-            </a:r>
-          </a:p>
-          <a:p/>
-          <a:p>
-            <a:r>
-              <a:t>The tone should still be comparative and practical. MongoDB is the example, but the larger lesson is about workload fit and trade-offs.</a:t>
-            </a:r>
-          </a:p>
         </p:txBody>
       </p:sp>
       <p:sp>
@@ -593,23 +577,7 @@
         <p:txBody>
           <a:bodyPr/>
           <a:lstStyle/>
-          <a:p>
-            <a:r>
-              <a:t>This slide helps students develop skepticism in the healthy sense. Every database choice creates failure modes.</a:t>
-            </a:r>
-          </a:p>
           <a:p/>
-          <a:p>
-            <a:r>
-              <a:t>Explain that MongoDB can encourage fast iteration, but that same flexibility can produce inconsistent field names, mixed document shapes, giant arrays, and painful migrations if teams are careless. Those are design failures, not product bugs.</a:t>
-            </a:r>
-          </a:p>
-          <a:p/>
-          <a:p>
-            <a:r>
-              <a:t>If students can name these anti-patterns now, they will make better project choices later.</a:t>
-            </a:r>
-          </a:p>
         </p:txBody>
       </p:sp>
       <p:sp>
@@ -675,23 +643,7 @@
         <p:txBody>
           <a:bodyPr/>
           <a:lstStyle/>
-          <a:p>
-            <a:r>
-              <a:t>Use this slide as a think-pair-share or short cold-call exercise. It converts the lecture from passive recognition into applied reasoning.</a:t>
-            </a:r>
-          </a:p>
           <a:p/>
-          <a:p>
-            <a:r>
-              <a:t>The important thing is not the exact product name students choose. What matters is whether they justify the choice using access pattern, relationship shape, growth pattern, and operational concerns.</a:t>
-            </a:r>
-          </a:p>
-          <a:p/>
-          <a:p>
-            <a:r>
-              <a:t>Ask for one admin concern with every answer. That keeps the class anchored in DBA thinking instead of drifting into pure application design.</a:t>
-            </a:r>
-          </a:p>
         </p:txBody>
       </p:sp>
       <p:sp>
@@ -757,23 +709,7 @@
         <p:txBody>
           <a:bodyPr/>
           <a:lstStyle/>
-          <a:p>
-            <a:r>
-              <a:t>The exit ticket turns the lecture into learning evidence. Students should have to produce concise reasoning, not just nod along during class.</a:t>
-            </a:r>
-          </a:p>
           <a:p/>
-          <a:p>
-            <a:r>
-              <a:t>The review packet extends that work after class. Its purpose is to make students retrieve the historical story, the NoSQL families, the MongoDB modeling rules, and the administrator responsibilities without relying only on slide review.</a:t>
-            </a:r>
-          </a:p>
-          <a:p/>
-          <a:p>
-            <a:r>
-              <a:t>If time is tight, at least collect a short written answer to the project-fit prompt. That answer tells you whether students are actually ready to choose between relational and document models.</a:t>
-            </a:r>
-          </a:p>
         </p:txBody>
       </p:sp>
       <p:sp>
@@ -839,23 +775,7 @@
         <p:txBody>
           <a:bodyPr/>
           <a:lstStyle/>
-          <a:p>
-            <a:r>
-              <a:t>This slide exists to reconnect the class, not to reteach everything from the bridge deck.</a:t>
-            </a:r>
-          </a:p>
           <a:p/>
-          <a:p>
-            <a:r>
-              <a:t>The key reminders are simple: NoSQL re-emerged because some workloads made different trade-offs attractive, MongoDB is the document-database case for this unit, and relational thinking is still relevant because comparison is what makes the model choices understandable.</a:t>
-            </a:r>
-          </a:p>
-          <a:p/>
-          <a:p>
-            <a:r>
-              <a:t>When students hear 'schema-less,' correct it again here. MongoDB gives you flexibility, but it still requires structure, review, and operational discipline.</a:t>
-            </a:r>
-          </a:p>
         </p:txBody>
       </p:sp>
       <p:sp>
@@ -921,23 +841,7 @@
         <p:txBody>
           <a:bodyPr/>
           <a:lstStyle/>
-          <a:p>
-            <a:r>
-              <a:t>Pause on vocabulary here because students new to MongoDB often lose confidence when the terms pile up. Keep the stack simple: server, database, collection, document, field.</a:t>
-            </a:r>
-          </a:p>
           <a:p/>
-          <a:p>
-            <a:r>
-              <a:t>The sample document is important because it shows why document databases feel intuitive to many developers. The order screen in an application often needs the customer snapshot, status, shipping information, and line items at the same time. A document can package that read pattern neatly.</a:t>
-            </a:r>
-          </a:p>
-          <a:p/>
-          <a:p>
-            <a:r>
-              <a:t>At the same time, warn students not to treat a document as a junk drawer. The fact that MongoDB permits nested structure does not mean every related fact should be embedded forever. Modeling discipline still matters.</a:t>
-            </a:r>
-          </a:p>
         </p:txBody>
       </p:sp>
       <p:sp>
@@ -1003,23 +907,7 @@
         <p:txBody>
           <a:bodyPr/>
           <a:lstStyle/>
-          <a:p>
-            <a:r>
-              <a:t>This is one of the most important teaching slides in the deck. Students already know normalization, so show them that document modeling is not random. It has a logic. The logic is to design around aggregates and access patterns rather than decomposing everything into reusable tables by default.</a:t>
-            </a:r>
-          </a:p>
           <a:p/>
-          <a:p>
-            <a:r>
-              <a:t>Use the order example because it makes duplication acceptable in a way students can reason about. Shipping addresses and product names often need to be preserved as historical snapshots anyway. That makes the document model easier to justify.</a:t>
-            </a:r>
-          </a:p>
-          <a:p/>
-          <a:p>
-            <a:r>
-              <a:t>Also show the limit of that logic. If the same customer record must be updated centrally across many workflows, or if the workload involves many cross-order analytical joins, a relational structure may still be better.</a:t>
-            </a:r>
-          </a:p>
         </p:txBody>
       </p:sp>
       <p:sp>
@@ -1085,23 +973,7 @@
         <p:txBody>
           <a:bodyPr/>
           <a:lstStyle/>
-          <a:p>
-            <a:r>
-              <a:t>Students usually overcorrect in one of two directions: they either try to normalize MongoDB until it looks like tables, or they embed everything and create giant documents.</a:t>
-            </a:r>
-          </a:p>
           <a:p/>
-          <a:p>
-            <a:r>
-              <a:t>Teach the embed/reference choice as a boundedness and ownership question. If the child data belongs to the parent and stays within a predictable size, embedding usually keeps reads simple and fast. If the child data is shared, reused, or grows unpredictably, referencing is safer.</a:t>
-            </a:r>
-          </a:p>
-          <a:p/>
-          <a:p>
-            <a:r>
-              <a:t>This is also a good place to mention that flexible schema can create schema drift if teams do not agree on structure. That is why review practices and validation rules matter.</a:t>
-            </a:r>
-          </a:p>
         </p:txBody>
       </p:sp>
       <p:sp>
@@ -1167,23 +1039,7 @@
         <p:txBody>
           <a:bodyPr/>
           <a:lstStyle/>
-          <a:p>
-            <a:r>
-              <a:t>Do not let this become a syntax dump. The educational goal is to show the shape of MongoDB operations, not to memorize every operator.</a:t>
-            </a:r>
-          </a:p>
           <a:p/>
-          <a:p>
-            <a:r>
-              <a:t>A reliable reading strategy helps: first identify the target collection, then the filter, then what fields are returned or modified. That mirrors the SQL habit students already have.</a:t>
-            </a:r>
-          </a:p>
-          <a:p/>
-          <a:p>
-            <a:r>
-              <a:t>Also stress that document boundaries influence correctness. Since single-document writes are atomic, the document structure itself becomes part of the transaction design decision.</a:t>
-            </a:r>
-          </a:p>
         </p:txBody>
       </p:sp>
       <p:sp>
@@ -1249,23 +1105,7 @@
         <p:txBody>
           <a:bodyPr/>
           <a:lstStyle/>
-          <a:p>
-            <a:r>
-              <a:t>Students coming from SQL often find the pipeline unusual at first. Help them by narrating each stage in plain language. Match shipped orders. Unwind line items. Group by customer. Sum revenue. Sort. Limit.</a:t>
-            </a:r>
-          </a:p>
           <a:p/>
-          <a:p>
-            <a:r>
-              <a:t>That narration matters because it keeps the pipeline tied to intent rather than syntax. It also creates a bridge to SQL's mental model of filter, group, aggregate, and order.</a:t>
-            </a:r>
-          </a:p>
-          <a:p/>
-          <a:p>
-            <a:r>
-              <a:t>Use this slide to remind them that performance is still a DBA concern. Flexibility does not excuse poor query planning or weak indexing.</a:t>
-            </a:r>
-          </a:p>
         </p:txBody>
       </p:sp>
       <p:sp>
@@ -1331,23 +1171,7 @@
         <p:txBody>
           <a:bodyPr/>
           <a:lstStyle/>
-          <a:p>
-            <a:r>
-              <a:t>This slide is where you protect students from oversimplified narratives. MongoDB is useful, but it is not the answer to every data problem. The best engineers learn to say why a tool fits and why another tool does not.</a:t>
-            </a:r>
-          </a:p>
           <a:p/>
-          <a:p>
-            <a:r>
-              <a:t>Use concrete examples. A catalog with variable product attributes often fits MongoDB well. A financial system with heavy cross-table reporting and strict relational constraints often still fits PostgreSQL better.</a:t>
-            </a:r>
-          </a:p>
-          <a:p/>
-          <a:p>
-            <a:r>
-              <a:t>If time allows, ask students to name one project idea that is more relational and one that is more document-shaped. That simple exercise reveals whether they are internalizing the trade-offs.</a:t>
-            </a:r>
-          </a:p>
         </p:txBody>
       </p:sp>
       <p:sp>
@@ -1413,23 +1237,7 @@
         <p:txBody>
           <a:bodyPr/>
           <a:lstStyle/>
-          <a:p>
-            <a:r>
-              <a:t>The course is Database Administration, so keep returning to the operator perspective. Students should not leave with the impression that MongoDB is only about developer convenience.</a:t>
-            </a:r>
-          </a:p>
           <a:p/>
-          <a:p>
-            <a:r>
-              <a:t>The right teaching contrast is this: in PostgreSQL, many structural rules are expressed through tables, constraints, and relational design. In MongoDB, some of that enforcement shifts into JSON Schema validators, application review, and query-driven index discipline. The need for governance is still there.</a:t>
-            </a:r>
-          </a:p>
-          <a:p/>
-          <a:p>
-            <a:r>
-              <a:t>This is also a good place to connect back to earlier weeks. Recovery, least privilege, and observability were not 'Postgres-only' ideas. They are database administration habits that transfer across systems.</a:t>
-            </a:r>
-          </a:p>
         </p:txBody>
       </p:sp>
       <p:sp>
